--- a/images/images.pptx
+++ b/images/images.pptx
@@ -6,9 +6,9 @@
   </p:sldMasterIdLst>
   <p:sldIdLst>
     <p:sldId id="256" r:id="rId2"/>
-    <p:sldId id="259" r:id="rId3"/>
-    <p:sldId id="260" r:id="rId4"/>
-    <p:sldId id="261" r:id="rId5"/>
+    <p:sldId id="261" r:id="rId3"/>
+    <p:sldId id="262" r:id="rId4"/>
+    <p:sldId id="263" r:id="rId5"/>
   </p:sldIdLst>
   <p:sldSz cx="12192000" cy="6858000"/>
   <p:notesSz cx="6858000" cy="9144000"/>
@@ -262,7 +262,7 @@
           <a:p>
             <a:fld id="{1E2C8572-9970-0F4D-A39B-B1546E31373A}" type="datetimeFigureOut">
               <a:rPr lang="en-US" smtClean="0"/>
-              <a:t>4/17/26</a:t>
+              <a:t>4/20/26</a:t>
             </a:fld>
             <a:endParaRPr lang="en-US"/>
           </a:p>
@@ -460,7 +460,7 @@
           <a:p>
             <a:fld id="{1E2C8572-9970-0F4D-A39B-B1546E31373A}" type="datetimeFigureOut">
               <a:rPr lang="en-US" smtClean="0"/>
-              <a:t>4/17/26</a:t>
+              <a:t>4/20/26</a:t>
             </a:fld>
             <a:endParaRPr lang="en-US"/>
           </a:p>
@@ -668,7 +668,7 @@
           <a:p>
             <a:fld id="{1E2C8572-9970-0F4D-A39B-B1546E31373A}" type="datetimeFigureOut">
               <a:rPr lang="en-US" smtClean="0"/>
-              <a:t>4/17/26</a:t>
+              <a:t>4/20/26</a:t>
             </a:fld>
             <a:endParaRPr lang="en-US"/>
           </a:p>
@@ -866,7 +866,7 @@
           <a:p>
             <a:fld id="{1E2C8572-9970-0F4D-A39B-B1546E31373A}" type="datetimeFigureOut">
               <a:rPr lang="en-US" smtClean="0"/>
-              <a:t>4/17/26</a:t>
+              <a:t>4/20/26</a:t>
             </a:fld>
             <a:endParaRPr lang="en-US"/>
           </a:p>
@@ -1141,7 +1141,7 @@
           <a:p>
             <a:fld id="{1E2C8572-9970-0F4D-A39B-B1546E31373A}" type="datetimeFigureOut">
               <a:rPr lang="en-US" smtClean="0"/>
-              <a:t>4/17/26</a:t>
+              <a:t>4/20/26</a:t>
             </a:fld>
             <a:endParaRPr lang="en-US"/>
           </a:p>
@@ -1406,7 +1406,7 @@
           <a:p>
             <a:fld id="{1E2C8572-9970-0F4D-A39B-B1546E31373A}" type="datetimeFigureOut">
               <a:rPr lang="en-US" smtClean="0"/>
-              <a:t>4/17/26</a:t>
+              <a:t>4/20/26</a:t>
             </a:fld>
             <a:endParaRPr lang="en-US"/>
           </a:p>
@@ -1818,7 +1818,7 @@
           <a:p>
             <a:fld id="{1E2C8572-9970-0F4D-A39B-B1546E31373A}" type="datetimeFigureOut">
               <a:rPr lang="en-US" smtClean="0"/>
-              <a:t>4/17/26</a:t>
+              <a:t>4/20/26</a:t>
             </a:fld>
             <a:endParaRPr lang="en-US"/>
           </a:p>
@@ -1959,7 +1959,7 @@
           <a:p>
             <a:fld id="{1E2C8572-9970-0F4D-A39B-B1546E31373A}" type="datetimeFigureOut">
               <a:rPr lang="en-US" smtClean="0"/>
-              <a:t>4/17/26</a:t>
+              <a:t>4/20/26</a:t>
             </a:fld>
             <a:endParaRPr lang="en-US"/>
           </a:p>
@@ -2072,7 +2072,7 @@
           <a:p>
             <a:fld id="{1E2C8572-9970-0F4D-A39B-B1546E31373A}" type="datetimeFigureOut">
               <a:rPr lang="en-US" smtClean="0"/>
-              <a:t>4/17/26</a:t>
+              <a:t>4/20/26</a:t>
             </a:fld>
             <a:endParaRPr lang="en-US"/>
           </a:p>
@@ -2383,7 +2383,7 @@
           <a:p>
             <a:fld id="{1E2C8572-9970-0F4D-A39B-B1546E31373A}" type="datetimeFigureOut">
               <a:rPr lang="en-US" smtClean="0"/>
-              <a:t>4/17/26</a:t>
+              <a:t>4/20/26</a:t>
             </a:fld>
             <a:endParaRPr lang="en-US"/>
           </a:p>
@@ -2671,7 +2671,7 @@
           <a:p>
             <a:fld id="{1E2C8572-9970-0F4D-A39B-B1546E31373A}" type="datetimeFigureOut">
               <a:rPr lang="en-US" smtClean="0"/>
-              <a:t>4/17/26</a:t>
+              <a:t>4/20/26</a:t>
             </a:fld>
             <a:endParaRPr lang="en-US"/>
           </a:p>
@@ -2912,7 +2912,7 @@
           <a:p>
             <a:fld id="{1E2C8572-9970-0F4D-A39B-B1546E31373A}" type="datetimeFigureOut">
               <a:rPr lang="en-US" smtClean="0"/>
-              <a:t>4/17/26</a:t>
+              <a:t>4/20/26</a:t>
             </a:fld>
             <a:endParaRPr lang="en-US"/>
           </a:p>
@@ -3492,7 +3492,7 @@
         <p:cNvPr id="1" name="">
           <a:extLst>
             <a:ext uri="{FF2B5EF4-FFF2-40B4-BE49-F238E27FC236}">
-              <a16:creationId xmlns:a16="http://schemas.microsoft.com/office/drawing/2014/main" id="{C3BFE20C-CCD4-D94B-081C-616AB270C2A7}"/>
+              <a16:creationId xmlns:a16="http://schemas.microsoft.com/office/drawing/2014/main" id="{8DD56CF2-A961-A9DB-EEA4-4C0A17A10BDB}"/>
             </a:ext>
           </a:extLst>
         </p:cNvPr>
@@ -3512,7 +3512,7 @@
           <p:cNvPr id="6" name="Oval 5">
             <a:extLst>
               <a:ext uri="{FF2B5EF4-FFF2-40B4-BE49-F238E27FC236}">
-                <a16:creationId xmlns:a16="http://schemas.microsoft.com/office/drawing/2014/main" id="{8E467675-6EF4-88B1-5E20-4531A919F115}"/>
+                <a16:creationId xmlns:a16="http://schemas.microsoft.com/office/drawing/2014/main" id="{BB9D95E0-38E8-C820-7437-0072037FEC9B}"/>
               </a:ext>
             </a:extLst>
           </p:cNvPr>
@@ -3564,7 +3564,7 @@
           <p:cNvPr id="13" name="TextBox 12">
             <a:extLst>
               <a:ext uri="{FF2B5EF4-FFF2-40B4-BE49-F238E27FC236}">
-                <a16:creationId xmlns:a16="http://schemas.microsoft.com/office/drawing/2014/main" id="{86AA6A00-BF83-817B-A0E1-97A78937B8F0}"/>
+                <a16:creationId xmlns:a16="http://schemas.microsoft.com/office/drawing/2014/main" id="{1F87FCAA-7E3A-2F24-B16D-7E5B82C2DF2B}"/>
               </a:ext>
             </a:extLst>
           </p:cNvPr>
@@ -3624,7 +3624,7 @@
           <p:cNvPr id="3" name="TextBox 2">
             <a:extLst>
               <a:ext uri="{FF2B5EF4-FFF2-40B4-BE49-F238E27FC236}">
-                <a16:creationId xmlns:a16="http://schemas.microsoft.com/office/drawing/2014/main" id="{61E092D9-10E3-6376-85FF-34DF9952AA9B}"/>
+                <a16:creationId xmlns:a16="http://schemas.microsoft.com/office/drawing/2014/main" id="{7F6A319E-1EDE-4846-2792-03AA091E765D}"/>
               </a:ext>
             </a:extLst>
           </p:cNvPr>
@@ -3669,7 +3669,7 @@
     </p:spTree>
     <p:extLst>
       <p:ext uri="{BB962C8B-B14F-4D97-AF65-F5344CB8AC3E}">
-        <p14:creationId xmlns:p14="http://schemas.microsoft.com/office/powerpoint/2010/main" val="1359047558"/>
+        <p14:creationId xmlns:p14="http://schemas.microsoft.com/office/powerpoint/2010/main" val="416557550"/>
       </p:ext>
     </p:extLst>
   </p:cSld>
@@ -3687,7 +3687,7 @@
         <p:cNvPr id="1" name="">
           <a:extLst>
             <a:ext uri="{FF2B5EF4-FFF2-40B4-BE49-F238E27FC236}">
-              <a16:creationId xmlns:a16="http://schemas.microsoft.com/office/drawing/2014/main" id="{35E3980C-F8D7-F021-B848-0AD5C44A9C67}"/>
+              <a16:creationId xmlns:a16="http://schemas.microsoft.com/office/drawing/2014/main" id="{3658E56A-7665-96B4-C29B-45164FD97AC2}"/>
             </a:ext>
           </a:extLst>
         </p:cNvPr>
@@ -3707,7 +3707,7 @@
           <p:cNvPr id="2" name="Oval 1">
             <a:extLst>
               <a:ext uri="{FF2B5EF4-FFF2-40B4-BE49-F238E27FC236}">
-                <a16:creationId xmlns:a16="http://schemas.microsoft.com/office/drawing/2014/main" id="{5B6308E5-EAD2-2DE6-DB59-0296B5FB455A}"/>
+                <a16:creationId xmlns:a16="http://schemas.microsoft.com/office/drawing/2014/main" id="{8D264510-9C43-6666-E1DD-CD1BF4A5A38D}"/>
               </a:ext>
             </a:extLst>
           </p:cNvPr>
@@ -3756,7 +3756,7 @@
           <p:cNvPr id="6" name="Oval 5">
             <a:extLst>
               <a:ext uri="{FF2B5EF4-FFF2-40B4-BE49-F238E27FC236}">
-                <a16:creationId xmlns:a16="http://schemas.microsoft.com/office/drawing/2014/main" id="{95A82917-6AA9-8765-901E-95B9AD8E3A5C}"/>
+                <a16:creationId xmlns:a16="http://schemas.microsoft.com/office/drawing/2014/main" id="{A8645038-10F0-8356-517E-CE1C6B1620C4}"/>
               </a:ext>
             </a:extLst>
           </p:cNvPr>
@@ -3808,7 +3808,7 @@
           <p:cNvPr id="13" name="TextBox 12">
             <a:extLst>
               <a:ext uri="{FF2B5EF4-FFF2-40B4-BE49-F238E27FC236}">
-                <a16:creationId xmlns:a16="http://schemas.microsoft.com/office/drawing/2014/main" id="{FA8A9681-8F23-B09C-4818-A50FCD9541FA}"/>
+                <a16:creationId xmlns:a16="http://schemas.microsoft.com/office/drawing/2014/main" id="{F14AB8F8-B439-8A46-CD66-560C8D77A8AF}"/>
               </a:ext>
             </a:extLst>
           </p:cNvPr>
@@ -3868,7 +3868,7 @@
           <p:cNvPr id="14" name="TextBox 13">
             <a:extLst>
               <a:ext uri="{FF2B5EF4-FFF2-40B4-BE49-F238E27FC236}">
-                <a16:creationId xmlns:a16="http://schemas.microsoft.com/office/drawing/2014/main" id="{C885FF57-5285-68A5-2706-FF9BB40E89B2}"/>
+                <a16:creationId xmlns:a16="http://schemas.microsoft.com/office/drawing/2014/main" id="{279BFBF8-3480-C2A5-26E3-08DCD250C684}"/>
               </a:ext>
             </a:extLst>
           </p:cNvPr>
@@ -3877,8 +3877,8 @@
         </p:nvSpPr>
         <p:spPr>
           <a:xfrm>
-            <a:off x="2510739" y="3247706"/>
-            <a:ext cx="2812888" cy="769441"/>
+            <a:off x="2659830" y="2962050"/>
+            <a:ext cx="2812888" cy="1446550"/>
           </a:xfrm>
           <a:prstGeom prst="rect">
             <a:avLst/>
@@ -3901,6 +3901,18 @@
               </a:rPr>
               <a:t>Involution</a:t>
             </a:r>
+          </a:p>
+          <a:p>
+            <a:pPr algn="ctr"/>
+            <a:r>
+              <a:rPr lang="en-US" sz="4400" dirty="0">
+                <a:solidFill>
+                  <a:schemeClr val="bg1"/>
+                </a:solidFill>
+                <a:latin typeface="Britannic Bold" panose="020B0903060703020204" pitchFamily="34" charset="77"/>
+              </a:rPr>
+              <a:t>&amp; “996”</a:t>
+            </a:r>
             <a:endParaRPr lang="en-US" sz="4800" dirty="0">
               <a:solidFill>
                 <a:schemeClr val="bg1"/>
@@ -3915,7 +3927,7 @@
           <p:cNvPr id="15" name="TextBox 14">
             <a:extLst>
               <a:ext uri="{FF2B5EF4-FFF2-40B4-BE49-F238E27FC236}">
-                <a16:creationId xmlns:a16="http://schemas.microsoft.com/office/drawing/2014/main" id="{BA61A6B2-09D0-7350-0B35-1510B3983379}"/>
+                <a16:creationId xmlns:a16="http://schemas.microsoft.com/office/drawing/2014/main" id="{70ECB706-57D2-144D-C96F-B952647E9D22}"/>
               </a:ext>
             </a:extLst>
           </p:cNvPr>
@@ -3964,7 +3976,7 @@
           <p:cNvPr id="3" name="TextBox 2">
             <a:extLst>
               <a:ext uri="{FF2B5EF4-FFF2-40B4-BE49-F238E27FC236}">
-                <a16:creationId xmlns:a16="http://schemas.microsoft.com/office/drawing/2014/main" id="{8BAFE0DB-36C8-325E-B054-8435F0C74420}"/>
+                <a16:creationId xmlns:a16="http://schemas.microsoft.com/office/drawing/2014/main" id="{15300DBB-4667-646B-00B0-C25171B8566E}"/>
               </a:ext>
             </a:extLst>
           </p:cNvPr>
@@ -4009,7 +4021,7 @@
     </p:spTree>
     <p:extLst>
       <p:ext uri="{BB962C8B-B14F-4D97-AF65-F5344CB8AC3E}">
-        <p14:creationId xmlns:p14="http://schemas.microsoft.com/office/powerpoint/2010/main" val="3883797606"/>
+        <p14:creationId xmlns:p14="http://schemas.microsoft.com/office/powerpoint/2010/main" val="565250322"/>
       </p:ext>
     </p:extLst>
   </p:cSld>
@@ -4027,7 +4039,7 @@
         <p:cNvPr id="1" name="">
           <a:extLst>
             <a:ext uri="{FF2B5EF4-FFF2-40B4-BE49-F238E27FC236}">
-              <a16:creationId xmlns:a16="http://schemas.microsoft.com/office/drawing/2014/main" id="{8DD56CF2-A961-A9DB-EEA4-4C0A17A10BDB}"/>
+              <a16:creationId xmlns:a16="http://schemas.microsoft.com/office/drawing/2014/main" id="{E90A39FB-3C48-62A9-2BB6-A94C1C964330}"/>
             </a:ext>
           </a:extLst>
         </p:cNvPr>
@@ -4047,7 +4059,7 @@
           <p:cNvPr id="2" name="Oval 1">
             <a:extLst>
               <a:ext uri="{FF2B5EF4-FFF2-40B4-BE49-F238E27FC236}">
-                <a16:creationId xmlns:a16="http://schemas.microsoft.com/office/drawing/2014/main" id="{2EDBBE96-389D-CCD7-C6BE-0BC2B4A787A5}"/>
+                <a16:creationId xmlns:a16="http://schemas.microsoft.com/office/drawing/2014/main" id="{4C747541-028C-A0C1-B0C0-B3FE0A8E0888}"/>
               </a:ext>
             </a:extLst>
           </p:cNvPr>
@@ -4096,7 +4108,7 @@
           <p:cNvPr id="6" name="Oval 5">
             <a:extLst>
               <a:ext uri="{FF2B5EF4-FFF2-40B4-BE49-F238E27FC236}">
-                <a16:creationId xmlns:a16="http://schemas.microsoft.com/office/drawing/2014/main" id="{BB9D95E0-38E8-C820-7437-0072037FEC9B}"/>
+                <a16:creationId xmlns:a16="http://schemas.microsoft.com/office/drawing/2014/main" id="{EA678F44-C5CF-3F2B-9402-D34A72DC85BB}"/>
               </a:ext>
             </a:extLst>
           </p:cNvPr>
@@ -4148,7 +4160,7 @@
           <p:cNvPr id="13" name="TextBox 12">
             <a:extLst>
               <a:ext uri="{FF2B5EF4-FFF2-40B4-BE49-F238E27FC236}">
-                <a16:creationId xmlns:a16="http://schemas.microsoft.com/office/drawing/2014/main" id="{1F87FCAA-7E3A-2F24-B16D-7E5B82C2DF2B}"/>
+                <a16:creationId xmlns:a16="http://schemas.microsoft.com/office/drawing/2014/main" id="{876248A2-DF4C-0F0A-2A73-E3662B7714CA}"/>
               </a:ext>
             </a:extLst>
           </p:cNvPr>
@@ -4208,7 +4220,7 @@
           <p:cNvPr id="14" name="TextBox 13">
             <a:extLst>
               <a:ext uri="{FF2B5EF4-FFF2-40B4-BE49-F238E27FC236}">
-                <a16:creationId xmlns:a16="http://schemas.microsoft.com/office/drawing/2014/main" id="{8DF5FA2D-5AE8-982E-0D43-69E1B50A5B34}"/>
+                <a16:creationId xmlns:a16="http://schemas.microsoft.com/office/drawing/2014/main" id="{7C31BD06-3B75-A61B-DAA9-F7D4EC08BF24}"/>
               </a:ext>
             </a:extLst>
           </p:cNvPr>
@@ -4217,8 +4229,8 @@
         </p:nvSpPr>
         <p:spPr>
           <a:xfrm>
-            <a:off x="2510739" y="3247706"/>
-            <a:ext cx="2812888" cy="769441"/>
+            <a:off x="2659830" y="2962050"/>
+            <a:ext cx="2812888" cy="1446550"/>
           </a:xfrm>
           <a:prstGeom prst="rect">
             <a:avLst/>
@@ -4241,6 +4253,18 @@
               </a:rPr>
               <a:t>Involution</a:t>
             </a:r>
+          </a:p>
+          <a:p>
+            <a:pPr algn="ctr"/>
+            <a:r>
+              <a:rPr lang="en-US" sz="4400" dirty="0">
+                <a:solidFill>
+                  <a:schemeClr val="bg1"/>
+                </a:solidFill>
+                <a:latin typeface="Britannic Bold" panose="020B0903060703020204" pitchFamily="34" charset="77"/>
+              </a:rPr>
+              <a:t>&amp; “996”</a:t>
+            </a:r>
             <a:endParaRPr lang="en-US" sz="4800" dirty="0">
               <a:solidFill>
                 <a:schemeClr val="bg1"/>
@@ -4255,7 +4279,7 @@
           <p:cNvPr id="15" name="TextBox 14">
             <a:extLst>
               <a:ext uri="{FF2B5EF4-FFF2-40B4-BE49-F238E27FC236}">
-                <a16:creationId xmlns:a16="http://schemas.microsoft.com/office/drawing/2014/main" id="{E7A8CDD4-BD12-751B-C412-E9821C890138}"/>
+                <a16:creationId xmlns:a16="http://schemas.microsoft.com/office/drawing/2014/main" id="{861AF9D6-8254-4B32-2DB0-014A2939EF3E}"/>
               </a:ext>
             </a:extLst>
           </p:cNvPr>
@@ -4304,7 +4328,7 @@
           <p:cNvPr id="16" name="TextBox 15">
             <a:extLst>
               <a:ext uri="{FF2B5EF4-FFF2-40B4-BE49-F238E27FC236}">
-                <a16:creationId xmlns:a16="http://schemas.microsoft.com/office/drawing/2014/main" id="{6FF1D322-5B41-F123-AC79-719D7CF930E5}"/>
+                <a16:creationId xmlns:a16="http://schemas.microsoft.com/office/drawing/2014/main" id="{4E8A6928-3BAC-4C6D-BA08-13CD9FBB12F8}"/>
               </a:ext>
             </a:extLst>
           </p:cNvPr>
@@ -4313,8 +4337,8 @@
         </p:nvSpPr>
         <p:spPr>
           <a:xfrm>
-            <a:off x="1663670" y="5072245"/>
-            <a:ext cx="8775551" cy="1323439"/>
+            <a:off x="1735930" y="5355523"/>
+            <a:ext cx="8775551" cy="707886"/>
           </a:xfrm>
           <a:prstGeom prst="rect">
             <a:avLst/>
@@ -4332,16 +4356,7 @@
               <a:rPr lang="en-US" sz="4000" dirty="0">
                 <a:latin typeface="Fira Sans Condensed Medium" panose="020B0603050000020004" pitchFamily="34" charset="0"/>
               </a:rPr>
-              <a:t>Rapid production innovation, </a:t>
-            </a:r>
-          </a:p>
-          <a:p>
-            <a:pPr algn="ctr"/>
-            <a:r>
-              <a:rPr lang="en-US" sz="4000" dirty="0">
-                <a:latin typeface="Fira Sans Condensed Medium" panose="020B0603050000020004" pitchFamily="34" charset="0"/>
-              </a:rPr>
-              <a:t>cost cutting, price wars</a:t>
+              <a:t>R&amp;D focus on production innovation</a:t>
             </a:r>
           </a:p>
         </p:txBody>
@@ -4351,7 +4366,7 @@
           <p:cNvPr id="3" name="TextBox 2">
             <a:extLst>
               <a:ext uri="{FF2B5EF4-FFF2-40B4-BE49-F238E27FC236}">
-                <a16:creationId xmlns:a16="http://schemas.microsoft.com/office/drawing/2014/main" id="{7F6A319E-1EDE-4846-2792-03AA091E765D}"/>
+                <a16:creationId xmlns:a16="http://schemas.microsoft.com/office/drawing/2014/main" id="{A2B0E9D6-97C0-3627-723C-906EF4F20E2B}"/>
               </a:ext>
             </a:extLst>
           </p:cNvPr>
@@ -4396,7 +4411,7 @@
     </p:spTree>
     <p:extLst>
       <p:ext uri="{BB962C8B-B14F-4D97-AF65-F5344CB8AC3E}">
-        <p14:creationId xmlns:p14="http://schemas.microsoft.com/office/powerpoint/2010/main" val="416557550"/>
+        <p14:creationId xmlns:p14="http://schemas.microsoft.com/office/powerpoint/2010/main" val="4081255887"/>
       </p:ext>
     </p:extLst>
   </p:cSld>
